--- a/02-精益培训/02-培训材料/04-高级精益培训大纲.pptx
+++ b/02-精益培训/02-培训材料/04-高级精益培训大纲.pptx
@@ -5814,7 +5814,7 @@
               </a:spcAft>
             </a:pPr>
             <a:r>
-              <a:t>  紧固件行业DMAIC项目实例</a:t>
+              <a:t>  制造业DMAIC项目实例</a:t>
             </a:r>
             <a:r>
               <a:rPr sz="1500" b="0">
@@ -6326,7 +6326,7 @@
               </a:spcAft>
             </a:pPr>
             <a:r>
-              <a:t>  紧固件企业突破性目标示例</a:t>
+              <a:t>  制造企业突破性目标示例</a:t>
             </a:r>
             <a:r>
               <a:rPr sz="1500" b="0">
@@ -6791,7 +6791,7 @@
               </a:spcAft>
             </a:pPr>
             <a:r>
-              <a:t>  某紧固件企业Hoshin Kanri实施案例</a:t>
+              <a:t>  某制造企业Hoshin Kanri实施案例</a:t>
             </a:r>
             <a:r>
               <a:rPr sz="1500" b="0">
@@ -8413,7 +8413,7 @@
               </a:spcAft>
             </a:pPr>
             <a:r>
-              <a:t>  某紧固件企业的精益评估实例</a:t>
+              <a:t>  某制造企业的精益评估实例</a:t>
             </a:r>
             <a:r>
               <a:rPr sz="1500" b="0">
@@ -8533,7 +8533,7 @@
               </a:spcAft>
             </a:pPr>
             <a:r>
-              <a:t>  了解紧固件行业供应链的优化方向</a:t>
+              <a:t>  了解制造业供应链的优化方向</a:t>
             </a:r>
             <a:r>
               <a:rPr sz="1500" b="0">
@@ -8653,26 +8653,26 @@
               </a:spcAft>
             </a:pPr>
             <a:r>
-              <a:t>  紧固件行业供应链的特点</a:t>
-            </a:r>
-            <a:r>
-              <a:rPr sz="1500" b="0">
-                <a:solidFill>
-                  <a:srgbClr val="333333"/>
-                </a:solidFill>
-                <a:latin typeface="SimSun"/>
-              </a:rPr>
-              <a:t/>
-            </a:r>
-          </a:p>
-          <a:p>
-            <a:pPr>
-              <a:spcAft>
-                <a:spcPts val="400"/>
-              </a:spcAft>
-            </a:pPr>
-            <a:r>
-              <a:t>  上游：钢材供应商（线材、盘元）</a:t>
+              <a:t>  制造业供应链的特点</a:t>
+            </a:r>
+            <a:r>
+              <a:rPr sz="1500" b="0">
+                <a:solidFill>
+                  <a:srgbClr val="333333"/>
+                </a:solidFill>
+                <a:latin typeface="SimSun"/>
+              </a:rPr>
+              <a:t/>
+            </a:r>
+          </a:p>
+          <a:p>
+            <a:pPr>
+              <a:spcAft>
+                <a:spcPts val="400"/>
+              </a:spcAft>
+            </a:pPr>
+            <a:r>
+              <a:t>  上游：钢材供应商（原材料、卷料）</a:t>
             </a:r>
             <a:r>
               <a:rPr sz="1500" b="0">
@@ -9042,7 +9042,7 @@
               </a:spcAft>
             </a:pPr>
             <a:r>
-              <a:t>5.4 紧固件供应链优化实践（45分钟）</a:t>
+              <a:t>5.4 产品供应链优化实践（45分钟）</a:t>
             </a:r>
             <a:r>
               <a:rPr sz="1600" b="0">
@@ -9061,7 +9061,7 @@
               </a:spcAft>
             </a:pPr>
             <a:r>
-              <a:t>  某紧固件企业供应链精益改善案例</a:t>
+              <a:t>  某制造企业供应链精益改善案例</a:t>
             </a:r>
             <a:r>
               <a:rPr sz="1500" b="0">
@@ -9551,7 +9551,7 @@
               </a:spcAft>
             </a:pPr>
             <a:r>
-              <a:t>  紧固件企业办公流程优化实例</a:t>
+              <a:t>  制造企业办公流程优化实例</a:t>
             </a:r>
             <a:r>
               <a:rPr sz="1500" b="0">
@@ -12109,7 +12109,7 @@
               </a:spcAft>
             </a:pPr>
             <a:r>
-              <a:t>  《紧固件行业高级改善案例集》（内部编制）</a:t>
+              <a:t>  《制造业高级改善案例集》（内部编制）</a:t>
             </a:r>
             <a:r>
               <a:rPr sz="1500" b="0">
